--- a/10-plantas/01-steelmaking/05-capacitacion/MO-CC2-01/MO-CC2-01_Capacitacion_AMMX.pptx
+++ b/10-plantas/01-steelmaking/05-capacitacion/MO-CC2-01/MO-CC2-01_Capacitacion_AMMX.pptx
@@ -16553,7 +16553,7 @@
                           <a:ea typeface="Century Gothic" pitchFamily="34" charset="-122"/>
                           <a:cs typeface="Century Gothic" pitchFamily="34" charset="-120"/>
                         </a:rPr>
-                        <a:t>Grúa de CC 50 t (S-27 propuesto)</a:t>
+                        <a:t>Grúa de CC 50 t (hoy S-15)</a:t>
                       </a:r>
                       <a:endParaRPr lang="en-US" sz="950" dirty="0">
                         <a:latin typeface="Century Gothic" charset="0"/>
@@ -19827,7 +19827,7 @@
                 <a:ea typeface="Calibri" pitchFamily="34" charset="-122"/>
                 <a:cs typeface="Calibri" pitchFamily="34" charset="-120"/>
               </a:rPr>
-              <a:t>Siguiente paso: OJT supervisado y evaluación práctica (TD-P07); registro en IMaS y DC-3/SIRCE. Validación: visto bueno técnica (pendientes: seguridad, laboral, diseño instruccional).</a:t>
+              <a:t>Siguiente paso: OJT supervisado y evaluación práctica (TD-P07); registro en IMaS y DC-3/SIRCE. Validación: visto bueno técnica, seguridad, laboral, diseño instruccional.</a:t>
             </a:r>
             <a:endParaRPr lang="en-US" sz="750" dirty="0"/>
           </a:p>
